--- a/GPP_ZombieAI_FierensDries_2DAE11.pptx
+++ b/GPP_ZombieAI_FierensDries_2DAE11.pptx
@@ -4,14 +4,16 @@
   <p:sldMasterIdLst>
     <p:sldMasterId id="2147483648" r:id="rId4"/>
   </p:sldMasterIdLst>
+  <p:notesMasterIdLst>
+    <p:notesMasterId r:id="rId11"/>
+  </p:notesMasterIdLst>
   <p:sldIdLst>
     <p:sldId id="256" r:id="rId5"/>
     <p:sldId id="257" r:id="rId6"/>
     <p:sldId id="260" r:id="rId7"/>
     <p:sldId id="258" r:id="rId8"/>
-    <p:sldId id="259" r:id="rId9"/>
+    <p:sldId id="263" r:id="rId9"/>
     <p:sldId id="262" r:id="rId10"/>
-    <p:sldId id="261" r:id="rId11"/>
   </p:sldIdLst>
   <p:sldSz cx="12192000" cy="6858000"/>
   <p:notesSz cx="6858000" cy="9144000"/>
@@ -256,6 +258,837 @@
 </pc:chgInfo>
 </file>
 
+<file path=ppt/notesMasters/notesMaster1.xml><?xml version="1.0" encoding="utf-8"?>
+<p:notesMaster xmlns:a="http://schemas.openxmlformats.org/drawingml/2006/main" xmlns:r="http://schemas.openxmlformats.org/officeDocument/2006/relationships" xmlns:p="http://schemas.openxmlformats.org/presentationml/2006/main">
+  <p:cSld>
+    <p:bg>
+      <p:bgRef idx="1001">
+        <a:schemeClr val="bg1"/>
+      </p:bgRef>
+    </p:bg>
+    <p:spTree>
+      <p:nvGrpSpPr>
+        <p:cNvPr id="1" name=""/>
+        <p:cNvGrpSpPr/>
+        <p:nvPr/>
+      </p:nvGrpSpPr>
+      <p:grpSpPr>
+        <a:xfrm>
+          <a:off x="0" y="0"/>
+          <a:ext cx="0" cy="0"/>
+          <a:chOff x="0" y="0"/>
+          <a:chExt cx="0" cy="0"/>
+        </a:xfrm>
+      </p:grpSpPr>
+      <p:sp>
+        <p:nvSpPr>
+          <p:cNvPr id="2" name="Tijdelijke aanduiding voor koptekst 1"/>
+          <p:cNvSpPr>
+            <a:spLocks noGrp="1"/>
+          </p:cNvSpPr>
+          <p:nvPr>
+            <p:ph type="hdr" sz="quarter"/>
+          </p:nvPr>
+        </p:nvSpPr>
+        <p:spPr>
+          <a:xfrm>
+            <a:off x="0" y="0"/>
+            <a:ext cx="2971800" cy="458788"/>
+          </a:xfrm>
+          <a:prstGeom prst="rect">
+            <a:avLst/>
+          </a:prstGeom>
+        </p:spPr>
+        <p:txBody>
+          <a:bodyPr vert="horz" lIns="91440" tIns="45720" rIns="91440" bIns="45720" rtlCol="0"/>
+          <a:lstStyle>
+            <a:lvl1pPr algn="l">
+              <a:defRPr sz="1200"/>
+            </a:lvl1pPr>
+          </a:lstStyle>
+          <a:p>
+            <a:endParaRPr lang="nl-BE"/>
+          </a:p>
+        </p:txBody>
+      </p:sp>
+      <p:sp>
+        <p:nvSpPr>
+          <p:cNvPr id="3" name="Tijdelijke aanduiding voor datum 2"/>
+          <p:cNvSpPr>
+            <a:spLocks noGrp="1"/>
+          </p:cNvSpPr>
+          <p:nvPr>
+            <p:ph type="dt" idx="1"/>
+          </p:nvPr>
+        </p:nvSpPr>
+        <p:spPr>
+          <a:xfrm>
+            <a:off x="3884613" y="0"/>
+            <a:ext cx="2971800" cy="458788"/>
+          </a:xfrm>
+          <a:prstGeom prst="rect">
+            <a:avLst/>
+          </a:prstGeom>
+        </p:spPr>
+        <p:txBody>
+          <a:bodyPr vert="horz" lIns="91440" tIns="45720" rIns="91440" bIns="45720" rtlCol="0"/>
+          <a:lstStyle>
+            <a:lvl1pPr algn="r">
+              <a:defRPr sz="1200"/>
+            </a:lvl1pPr>
+          </a:lstStyle>
+          <a:p>
+            <a:fld id="{43CD790A-5CC4-426E-AA88-8371AE626A10}" type="datetimeFigureOut">
+              <a:rPr lang="nl-BE" smtClean="0"/>
+              <a:t>6/06/2026</a:t>
+            </a:fld>
+            <a:endParaRPr lang="nl-BE"/>
+          </a:p>
+        </p:txBody>
+      </p:sp>
+      <p:sp>
+        <p:nvSpPr>
+          <p:cNvPr id="4" name="Tijdelijke aanduiding voor dia-afbeelding 3"/>
+          <p:cNvSpPr>
+            <a:spLocks noGrp="1" noRot="1" noChangeAspect="1"/>
+          </p:cNvSpPr>
+          <p:nvPr>
+            <p:ph type="sldImg" idx="2"/>
+          </p:nvPr>
+        </p:nvSpPr>
+        <p:spPr>
+          <a:xfrm>
+            <a:off x="685800" y="1143000"/>
+            <a:ext cx="5486400" cy="3086100"/>
+          </a:xfrm>
+          <a:prstGeom prst="rect">
+            <a:avLst/>
+          </a:prstGeom>
+          <a:noFill/>
+          <a:ln w="12700">
+            <a:solidFill>
+              <a:prstClr val="black"/>
+            </a:solidFill>
+          </a:ln>
+        </p:spPr>
+        <p:txBody>
+          <a:bodyPr vert="horz" lIns="91440" tIns="45720" rIns="91440" bIns="45720" rtlCol="0" anchor="ctr"/>
+          <a:lstStyle/>
+          <a:p>
+            <a:endParaRPr lang="nl-BE"/>
+          </a:p>
+        </p:txBody>
+      </p:sp>
+      <p:sp>
+        <p:nvSpPr>
+          <p:cNvPr id="5" name="Tijdelijke aanduiding voor notities 4"/>
+          <p:cNvSpPr>
+            <a:spLocks noGrp="1"/>
+          </p:cNvSpPr>
+          <p:nvPr>
+            <p:ph type="body" sz="quarter" idx="3"/>
+          </p:nvPr>
+        </p:nvSpPr>
+        <p:spPr>
+          <a:xfrm>
+            <a:off x="685800" y="4400550"/>
+            <a:ext cx="5486400" cy="3600450"/>
+          </a:xfrm>
+          <a:prstGeom prst="rect">
+            <a:avLst/>
+          </a:prstGeom>
+        </p:spPr>
+        <p:txBody>
+          <a:bodyPr vert="horz" lIns="91440" tIns="45720" rIns="91440" bIns="45720" rtlCol="0"/>
+          <a:lstStyle/>
+          <a:p>
+            <a:pPr lvl="0"/>
+            <a:r>
+              <a:rPr lang="nl-NL"/>
+              <a:t>Klikken om de tekststijl van het model te bewerken</a:t>
+            </a:r>
+          </a:p>
+          <a:p>
+            <a:pPr lvl="1"/>
+            <a:r>
+              <a:rPr lang="nl-NL"/>
+              <a:t>Tweede niveau</a:t>
+            </a:r>
+          </a:p>
+          <a:p>
+            <a:pPr lvl="2"/>
+            <a:r>
+              <a:rPr lang="nl-NL"/>
+              <a:t>Derde niveau</a:t>
+            </a:r>
+          </a:p>
+          <a:p>
+            <a:pPr lvl="3"/>
+            <a:r>
+              <a:rPr lang="nl-NL"/>
+              <a:t>Vierde niveau</a:t>
+            </a:r>
+          </a:p>
+          <a:p>
+            <a:pPr lvl="4"/>
+            <a:r>
+              <a:rPr lang="nl-NL"/>
+              <a:t>Vijfde niveau</a:t>
+            </a:r>
+            <a:endParaRPr lang="nl-BE"/>
+          </a:p>
+        </p:txBody>
+      </p:sp>
+      <p:sp>
+        <p:nvSpPr>
+          <p:cNvPr id="6" name="Tijdelijke aanduiding voor voettekst 5"/>
+          <p:cNvSpPr>
+            <a:spLocks noGrp="1"/>
+          </p:cNvSpPr>
+          <p:nvPr>
+            <p:ph type="ftr" sz="quarter" idx="4"/>
+          </p:nvPr>
+        </p:nvSpPr>
+        <p:spPr>
+          <a:xfrm>
+            <a:off x="0" y="8685213"/>
+            <a:ext cx="2971800" cy="458787"/>
+          </a:xfrm>
+          <a:prstGeom prst="rect">
+            <a:avLst/>
+          </a:prstGeom>
+        </p:spPr>
+        <p:txBody>
+          <a:bodyPr vert="horz" lIns="91440" tIns="45720" rIns="91440" bIns="45720" rtlCol="0" anchor="b"/>
+          <a:lstStyle>
+            <a:lvl1pPr algn="l">
+              <a:defRPr sz="1200"/>
+            </a:lvl1pPr>
+          </a:lstStyle>
+          <a:p>
+            <a:endParaRPr lang="nl-BE"/>
+          </a:p>
+        </p:txBody>
+      </p:sp>
+      <p:sp>
+        <p:nvSpPr>
+          <p:cNvPr id="7" name="Tijdelijke aanduiding voor dianummer 6"/>
+          <p:cNvSpPr>
+            <a:spLocks noGrp="1"/>
+          </p:cNvSpPr>
+          <p:nvPr>
+            <p:ph type="sldNum" sz="quarter" idx="5"/>
+          </p:nvPr>
+        </p:nvSpPr>
+        <p:spPr>
+          <a:xfrm>
+            <a:off x="3884613" y="8685213"/>
+            <a:ext cx="2971800" cy="458787"/>
+          </a:xfrm>
+          <a:prstGeom prst="rect">
+            <a:avLst/>
+          </a:prstGeom>
+        </p:spPr>
+        <p:txBody>
+          <a:bodyPr vert="horz" lIns="91440" tIns="45720" rIns="91440" bIns="45720" rtlCol="0" anchor="b"/>
+          <a:lstStyle>
+            <a:lvl1pPr algn="r">
+              <a:defRPr sz="1200"/>
+            </a:lvl1pPr>
+          </a:lstStyle>
+          <a:p>
+            <a:fld id="{85A79062-8951-4794-A108-17A6DB70DC73}" type="slidenum">
+              <a:rPr lang="nl-BE" smtClean="0"/>
+              <a:t>‹nr.›</a:t>
+            </a:fld>
+            <a:endParaRPr lang="nl-BE"/>
+          </a:p>
+        </p:txBody>
+      </p:sp>
+    </p:spTree>
+    <p:extLst>
+      <p:ext uri="{BB962C8B-B14F-4D97-AF65-F5344CB8AC3E}">
+        <p14:creationId xmlns:p14="http://schemas.microsoft.com/office/powerpoint/2010/main" val="486724217"/>
+      </p:ext>
+    </p:extLst>
+  </p:cSld>
+  <p:clrMap bg1="lt1" tx1="dk1" bg2="lt2" tx2="dk2" accent1="accent1" accent2="accent2" accent3="accent3" accent4="accent4" accent5="accent5" accent6="accent6" hlink="hlink" folHlink="folHlink"/>
+  <p:notesStyle>
+    <a:lvl1pPr marL="0" algn="l" defTabSz="914400" rtl="0" eaLnBrk="1" latinLnBrk="0" hangingPunct="1">
+      <a:defRPr sz="1200" kern="1200">
+        <a:solidFill>
+          <a:schemeClr val="tx1"/>
+        </a:solidFill>
+        <a:latin typeface="+mn-lt"/>
+        <a:ea typeface="+mn-ea"/>
+        <a:cs typeface="+mn-cs"/>
+      </a:defRPr>
+    </a:lvl1pPr>
+    <a:lvl2pPr marL="457200" algn="l" defTabSz="914400" rtl="0" eaLnBrk="1" latinLnBrk="0" hangingPunct="1">
+      <a:defRPr sz="1200" kern="1200">
+        <a:solidFill>
+          <a:schemeClr val="tx1"/>
+        </a:solidFill>
+        <a:latin typeface="+mn-lt"/>
+        <a:ea typeface="+mn-ea"/>
+        <a:cs typeface="+mn-cs"/>
+      </a:defRPr>
+    </a:lvl2pPr>
+    <a:lvl3pPr marL="914400" algn="l" defTabSz="914400" rtl="0" eaLnBrk="1" latinLnBrk="0" hangingPunct="1">
+      <a:defRPr sz="1200" kern="1200">
+        <a:solidFill>
+          <a:schemeClr val="tx1"/>
+        </a:solidFill>
+        <a:latin typeface="+mn-lt"/>
+        <a:ea typeface="+mn-ea"/>
+        <a:cs typeface="+mn-cs"/>
+      </a:defRPr>
+    </a:lvl3pPr>
+    <a:lvl4pPr marL="1371600" algn="l" defTabSz="914400" rtl="0" eaLnBrk="1" latinLnBrk="0" hangingPunct="1">
+      <a:defRPr sz="1200" kern="1200">
+        <a:solidFill>
+          <a:schemeClr val="tx1"/>
+        </a:solidFill>
+        <a:latin typeface="+mn-lt"/>
+        <a:ea typeface="+mn-ea"/>
+        <a:cs typeface="+mn-cs"/>
+      </a:defRPr>
+    </a:lvl4pPr>
+    <a:lvl5pPr marL="1828800" algn="l" defTabSz="914400" rtl="0" eaLnBrk="1" latinLnBrk="0" hangingPunct="1">
+      <a:defRPr sz="1200" kern="1200">
+        <a:solidFill>
+          <a:schemeClr val="tx1"/>
+        </a:solidFill>
+        <a:latin typeface="+mn-lt"/>
+        <a:ea typeface="+mn-ea"/>
+        <a:cs typeface="+mn-cs"/>
+      </a:defRPr>
+    </a:lvl5pPr>
+    <a:lvl6pPr marL="2286000" algn="l" defTabSz="914400" rtl="0" eaLnBrk="1" latinLnBrk="0" hangingPunct="1">
+      <a:defRPr sz="1200" kern="1200">
+        <a:solidFill>
+          <a:schemeClr val="tx1"/>
+        </a:solidFill>
+        <a:latin typeface="+mn-lt"/>
+        <a:ea typeface="+mn-ea"/>
+        <a:cs typeface="+mn-cs"/>
+      </a:defRPr>
+    </a:lvl6pPr>
+    <a:lvl7pPr marL="2743200" algn="l" defTabSz="914400" rtl="0" eaLnBrk="1" latinLnBrk="0" hangingPunct="1">
+      <a:defRPr sz="1200" kern="1200">
+        <a:solidFill>
+          <a:schemeClr val="tx1"/>
+        </a:solidFill>
+        <a:latin typeface="+mn-lt"/>
+        <a:ea typeface="+mn-ea"/>
+        <a:cs typeface="+mn-cs"/>
+      </a:defRPr>
+    </a:lvl7pPr>
+    <a:lvl8pPr marL="3200400" algn="l" defTabSz="914400" rtl="0" eaLnBrk="1" latinLnBrk="0" hangingPunct="1">
+      <a:defRPr sz="1200" kern="1200">
+        <a:solidFill>
+          <a:schemeClr val="tx1"/>
+        </a:solidFill>
+        <a:latin typeface="+mn-lt"/>
+        <a:ea typeface="+mn-ea"/>
+        <a:cs typeface="+mn-cs"/>
+      </a:defRPr>
+    </a:lvl8pPr>
+    <a:lvl9pPr marL="3657600" algn="l" defTabSz="914400" rtl="0" eaLnBrk="1" latinLnBrk="0" hangingPunct="1">
+      <a:defRPr sz="1200" kern="1200">
+        <a:solidFill>
+          <a:schemeClr val="tx1"/>
+        </a:solidFill>
+        <a:latin typeface="+mn-lt"/>
+        <a:ea typeface="+mn-ea"/>
+        <a:cs typeface="+mn-cs"/>
+      </a:defRPr>
+    </a:lvl9pPr>
+  </p:notesStyle>
+</p:notesMaster>
+</file>
+
+<file path=ppt/notesSlides/notesSlide1.xml><?xml version="1.0" encoding="utf-8"?>
+<p:notes xmlns:a="http://schemas.openxmlformats.org/drawingml/2006/main" xmlns:r="http://schemas.openxmlformats.org/officeDocument/2006/relationships" xmlns:p="http://schemas.openxmlformats.org/presentationml/2006/main">
+  <p:cSld>
+    <p:spTree>
+      <p:nvGrpSpPr>
+        <p:cNvPr id="1" name=""/>
+        <p:cNvGrpSpPr/>
+        <p:nvPr/>
+      </p:nvGrpSpPr>
+      <p:grpSpPr>
+        <a:xfrm>
+          <a:off x="0" y="0"/>
+          <a:ext cx="0" cy="0"/>
+          <a:chOff x="0" y="0"/>
+          <a:chExt cx="0" cy="0"/>
+        </a:xfrm>
+      </p:grpSpPr>
+      <p:sp>
+        <p:nvSpPr>
+          <p:cNvPr id="2" name="Tijdelijke aanduiding voor dia-afbeelding 1"/>
+          <p:cNvSpPr>
+            <a:spLocks noGrp="1" noRot="1" noChangeAspect="1"/>
+          </p:cNvSpPr>
+          <p:nvPr>
+            <p:ph type="sldImg"/>
+          </p:nvPr>
+        </p:nvSpPr>
+        <p:spPr/>
+      </p:sp>
+      <p:sp>
+        <p:nvSpPr>
+          <p:cNvPr id="3" name="Tijdelijke aanduiding voor notities 2"/>
+          <p:cNvSpPr>
+            <a:spLocks noGrp="1"/>
+          </p:cNvSpPr>
+          <p:nvPr>
+            <p:ph type="body" idx="1"/>
+          </p:nvPr>
+        </p:nvSpPr>
+        <p:spPr/>
+        <p:txBody>
+          <a:bodyPr/>
+          <a:lstStyle/>
+          <a:p>
+            <a:endParaRPr lang="nl-BE" dirty="0"/>
+          </a:p>
+        </p:txBody>
+      </p:sp>
+      <p:sp>
+        <p:nvSpPr>
+          <p:cNvPr id="4" name="Tijdelijke aanduiding voor dianummer 3"/>
+          <p:cNvSpPr>
+            <a:spLocks noGrp="1"/>
+          </p:cNvSpPr>
+          <p:nvPr>
+            <p:ph type="sldNum" sz="quarter" idx="5"/>
+          </p:nvPr>
+        </p:nvSpPr>
+        <p:spPr/>
+        <p:txBody>
+          <a:bodyPr/>
+          <a:lstStyle/>
+          <a:p>
+            <a:fld id="{85A79062-8951-4794-A108-17A6DB70DC73}" type="slidenum">
+              <a:rPr lang="nl-BE" smtClean="0"/>
+              <a:t>2</a:t>
+            </a:fld>
+            <a:endParaRPr lang="nl-BE"/>
+          </a:p>
+        </p:txBody>
+      </p:sp>
+    </p:spTree>
+    <p:extLst>
+      <p:ext uri="{BB962C8B-B14F-4D97-AF65-F5344CB8AC3E}">
+        <p14:creationId xmlns:p14="http://schemas.microsoft.com/office/powerpoint/2010/main" val="2633177113"/>
+      </p:ext>
+    </p:extLst>
+  </p:cSld>
+  <p:clrMapOvr>
+    <a:masterClrMapping/>
+  </p:clrMapOvr>
+</p:notes>
+</file>
+
+<file path=ppt/notesSlides/notesSlide2.xml><?xml version="1.0" encoding="utf-8"?>
+<p:notes xmlns:a="http://schemas.openxmlformats.org/drawingml/2006/main" xmlns:r="http://schemas.openxmlformats.org/officeDocument/2006/relationships" xmlns:p="http://schemas.openxmlformats.org/presentationml/2006/main">
+  <p:cSld>
+    <p:spTree>
+      <p:nvGrpSpPr>
+        <p:cNvPr id="1" name=""/>
+        <p:cNvGrpSpPr/>
+        <p:nvPr/>
+      </p:nvGrpSpPr>
+      <p:grpSpPr>
+        <a:xfrm>
+          <a:off x="0" y="0"/>
+          <a:ext cx="0" cy="0"/>
+          <a:chOff x="0" y="0"/>
+          <a:chExt cx="0" cy="0"/>
+        </a:xfrm>
+      </p:grpSpPr>
+      <p:sp>
+        <p:nvSpPr>
+          <p:cNvPr id="2" name="Tijdelijke aanduiding voor dia-afbeelding 1"/>
+          <p:cNvSpPr>
+            <a:spLocks noGrp="1" noRot="1" noChangeAspect="1"/>
+          </p:cNvSpPr>
+          <p:nvPr>
+            <p:ph type="sldImg"/>
+          </p:nvPr>
+        </p:nvSpPr>
+        <p:spPr/>
+      </p:sp>
+      <p:sp>
+        <p:nvSpPr>
+          <p:cNvPr id="3" name="Tijdelijke aanduiding voor notities 2"/>
+          <p:cNvSpPr>
+            <a:spLocks noGrp="1"/>
+          </p:cNvSpPr>
+          <p:nvPr>
+            <p:ph type="body" idx="1"/>
+          </p:nvPr>
+        </p:nvSpPr>
+        <p:spPr/>
+        <p:txBody>
+          <a:bodyPr/>
+          <a:lstStyle/>
+          <a:p>
+            <a:pPr marL="0" marR="0" lvl="0" indent="0" algn="l" defTabSz="914400" rtl="0" eaLnBrk="1" fontAlgn="auto" latinLnBrk="0" hangingPunct="1">
+              <a:lnSpc>
+                <a:spcPct val="100000"/>
+              </a:lnSpc>
+              <a:spcBef>
+                <a:spcPts val="0"/>
+              </a:spcBef>
+              <a:spcAft>
+                <a:spcPts val="0"/>
+              </a:spcAft>
+              <a:buClrTx/>
+              <a:buSzTx/>
+              <a:buFontTx/>
+              <a:buNone/>
+              <a:tabLst/>
+              <a:defRPr/>
+            </a:pPr>
+            <a:r>
+              <a:rPr lang="en-US" i="1" dirty="0">
+                <a:solidFill>
+                  <a:schemeClr val="bg1">
+                    <a:lumMod val="75000"/>
+                  </a:schemeClr>
+                </a:solidFill>
+              </a:rPr>
+              <a:t>How does your agent manage the inventory (inventory organization, item usage, picking up and remembering items,…)? </a:t>
+            </a:r>
+            <a:endParaRPr lang="en-BE" i="1" dirty="0">
+              <a:solidFill>
+                <a:schemeClr val="bg1">
+                  <a:lumMod val="75000"/>
+                </a:schemeClr>
+              </a:solidFill>
+            </a:endParaRPr>
+          </a:p>
+          <a:p>
+            <a:endParaRPr lang="nl-BE" dirty="0"/>
+          </a:p>
+        </p:txBody>
+      </p:sp>
+      <p:sp>
+        <p:nvSpPr>
+          <p:cNvPr id="4" name="Tijdelijke aanduiding voor dianummer 3"/>
+          <p:cNvSpPr>
+            <a:spLocks noGrp="1"/>
+          </p:cNvSpPr>
+          <p:nvPr>
+            <p:ph type="sldNum" sz="quarter" idx="5"/>
+          </p:nvPr>
+        </p:nvSpPr>
+        <p:spPr/>
+        <p:txBody>
+          <a:bodyPr/>
+          <a:lstStyle/>
+          <a:p>
+            <a:fld id="{85A79062-8951-4794-A108-17A6DB70DC73}" type="slidenum">
+              <a:rPr lang="nl-BE" smtClean="0"/>
+              <a:t>4</a:t>
+            </a:fld>
+            <a:endParaRPr lang="nl-BE"/>
+          </a:p>
+        </p:txBody>
+      </p:sp>
+    </p:spTree>
+    <p:extLst>
+      <p:ext uri="{BB962C8B-B14F-4D97-AF65-F5344CB8AC3E}">
+        <p14:creationId xmlns:p14="http://schemas.microsoft.com/office/powerpoint/2010/main" val="1841313177"/>
+      </p:ext>
+    </p:extLst>
+  </p:cSld>
+  <p:clrMapOvr>
+    <a:masterClrMapping/>
+  </p:clrMapOvr>
+</p:notes>
+</file>
+
+<file path=ppt/notesSlides/notesSlide3.xml><?xml version="1.0" encoding="utf-8"?>
+<p:notes xmlns:a="http://schemas.openxmlformats.org/drawingml/2006/main" xmlns:r="http://schemas.openxmlformats.org/officeDocument/2006/relationships" xmlns:p="http://schemas.openxmlformats.org/presentationml/2006/main">
+  <p:cSld>
+    <p:spTree>
+      <p:nvGrpSpPr>
+        <p:cNvPr id="1" name="">
+          <a:extLst>
+            <a:ext uri="{FF2B5EF4-FFF2-40B4-BE49-F238E27FC236}">
+              <a16:creationId xmlns:a16="http://schemas.microsoft.com/office/drawing/2014/main" id="{C1196E4D-A882-7B86-6F28-DA81D6929605}"/>
+            </a:ext>
+          </a:extLst>
+        </p:cNvPr>
+        <p:cNvGrpSpPr/>
+        <p:nvPr/>
+      </p:nvGrpSpPr>
+      <p:grpSpPr>
+        <a:xfrm>
+          <a:off x="0" y="0"/>
+          <a:ext cx="0" cy="0"/>
+          <a:chOff x="0" y="0"/>
+          <a:chExt cx="0" cy="0"/>
+        </a:xfrm>
+      </p:grpSpPr>
+      <p:sp>
+        <p:nvSpPr>
+          <p:cNvPr id="2" name="Tijdelijke aanduiding voor dia-afbeelding 1">
+            <a:extLst>
+              <a:ext uri="{FF2B5EF4-FFF2-40B4-BE49-F238E27FC236}">
+                <a16:creationId xmlns:a16="http://schemas.microsoft.com/office/drawing/2014/main" id="{8EF6E1D4-CD63-E8C8-5369-FDBE5E30AFB8}"/>
+              </a:ext>
+            </a:extLst>
+          </p:cNvPr>
+          <p:cNvSpPr>
+            <a:spLocks noGrp="1" noRot="1" noChangeAspect="1"/>
+          </p:cNvSpPr>
+          <p:nvPr>
+            <p:ph type="sldImg"/>
+          </p:nvPr>
+        </p:nvSpPr>
+        <p:spPr/>
+      </p:sp>
+      <p:sp>
+        <p:nvSpPr>
+          <p:cNvPr id="3" name="Tijdelijke aanduiding voor notities 2">
+            <a:extLst>
+              <a:ext uri="{FF2B5EF4-FFF2-40B4-BE49-F238E27FC236}">
+                <a16:creationId xmlns:a16="http://schemas.microsoft.com/office/drawing/2014/main" id="{5D8AEDED-95D0-AC20-DF48-C7B89F92EABC}"/>
+              </a:ext>
+            </a:extLst>
+          </p:cNvPr>
+          <p:cNvSpPr>
+            <a:spLocks noGrp="1"/>
+          </p:cNvSpPr>
+          <p:nvPr>
+            <p:ph type="body" idx="1"/>
+          </p:nvPr>
+        </p:nvSpPr>
+        <p:spPr/>
+        <p:txBody>
+          <a:bodyPr/>
+          <a:lstStyle/>
+          <a:p>
+            <a:pPr marL="0" marR="0" lvl="0" indent="0" algn="l" defTabSz="914400" rtl="0" eaLnBrk="1" fontAlgn="auto" latinLnBrk="0" hangingPunct="1">
+              <a:lnSpc>
+                <a:spcPct val="100000"/>
+              </a:lnSpc>
+              <a:spcBef>
+                <a:spcPts val="0"/>
+              </a:spcBef>
+              <a:spcAft>
+                <a:spcPts val="0"/>
+              </a:spcAft>
+              <a:buClrTx/>
+              <a:buSzTx/>
+              <a:buFontTx/>
+              <a:buNone/>
+              <a:tabLst/>
+              <a:defRPr/>
+            </a:pPr>
+            <a:r>
+              <a:rPr lang="en-US" i="1" dirty="0">
+                <a:solidFill>
+                  <a:schemeClr val="bg1">
+                    <a:lumMod val="75000"/>
+                  </a:schemeClr>
+                </a:solidFill>
+              </a:rPr>
+              <a:t>How many steering behaviors does it use? Does it use blended steering? =&gt; Wander, Seek, Face, Flee. EQS for pathfinding, Also easier to </a:t>
+            </a:r>
+            <a:r>
+              <a:rPr lang="en-US" i="1">
+                <a:solidFill>
+                  <a:schemeClr val="bg1">
+                    <a:lumMod val="75000"/>
+                  </a:schemeClr>
+                </a:solidFill>
+              </a:rPr>
+              <a:t>leave houses. </a:t>
+            </a:r>
+            <a:r>
+              <a:rPr lang="en-US" i="1" dirty="0">
+                <a:solidFill>
+                  <a:schemeClr val="bg1">
+                    <a:lumMod val="75000"/>
+                  </a:schemeClr>
+                </a:solidFill>
+              </a:rPr>
+              <a:t>No blended steering</a:t>
+            </a:r>
+            <a:endParaRPr lang="en-BE" i="1" dirty="0">
+              <a:solidFill>
+                <a:schemeClr val="bg1">
+                  <a:lumMod val="75000"/>
+                </a:schemeClr>
+              </a:solidFill>
+            </a:endParaRPr>
+          </a:p>
+          <a:p>
+            <a:endParaRPr lang="nl-BE" dirty="0"/>
+          </a:p>
+        </p:txBody>
+      </p:sp>
+      <p:sp>
+        <p:nvSpPr>
+          <p:cNvPr id="4" name="Tijdelijke aanduiding voor dianummer 3">
+            <a:extLst>
+              <a:ext uri="{FF2B5EF4-FFF2-40B4-BE49-F238E27FC236}">
+                <a16:creationId xmlns:a16="http://schemas.microsoft.com/office/drawing/2014/main" id="{2BE360A9-67FA-0BCF-C6FA-C0D5194AC4E0}"/>
+              </a:ext>
+            </a:extLst>
+          </p:cNvPr>
+          <p:cNvSpPr>
+            <a:spLocks noGrp="1"/>
+          </p:cNvSpPr>
+          <p:nvPr>
+            <p:ph type="sldNum" sz="quarter" idx="5"/>
+          </p:nvPr>
+        </p:nvSpPr>
+        <p:spPr/>
+        <p:txBody>
+          <a:bodyPr/>
+          <a:lstStyle/>
+          <a:p>
+            <a:fld id="{85A79062-8951-4794-A108-17A6DB70DC73}" type="slidenum">
+              <a:rPr lang="nl-BE" smtClean="0"/>
+              <a:t>5</a:t>
+            </a:fld>
+            <a:endParaRPr lang="nl-BE"/>
+          </a:p>
+        </p:txBody>
+      </p:sp>
+    </p:spTree>
+    <p:extLst>
+      <p:ext uri="{BB962C8B-B14F-4D97-AF65-F5344CB8AC3E}">
+        <p14:creationId xmlns:p14="http://schemas.microsoft.com/office/powerpoint/2010/main" val="487526087"/>
+      </p:ext>
+    </p:extLst>
+  </p:cSld>
+  <p:clrMapOvr>
+    <a:masterClrMapping/>
+  </p:clrMapOvr>
+</p:notes>
+</file>
+
+<file path=ppt/notesSlides/notesSlide4.xml><?xml version="1.0" encoding="utf-8"?>
+<p:notes xmlns:a="http://schemas.openxmlformats.org/drawingml/2006/main" xmlns:r="http://schemas.openxmlformats.org/officeDocument/2006/relationships" xmlns:p="http://schemas.openxmlformats.org/presentationml/2006/main">
+  <p:cSld>
+    <p:spTree>
+      <p:nvGrpSpPr>
+        <p:cNvPr id="1" name=""/>
+        <p:cNvGrpSpPr/>
+        <p:nvPr/>
+      </p:nvGrpSpPr>
+      <p:grpSpPr>
+        <a:xfrm>
+          <a:off x="0" y="0"/>
+          <a:ext cx="0" cy="0"/>
+          <a:chOff x="0" y="0"/>
+          <a:chExt cx="0" cy="0"/>
+        </a:xfrm>
+      </p:grpSpPr>
+      <p:sp>
+        <p:nvSpPr>
+          <p:cNvPr id="2" name="Tijdelijke aanduiding voor dia-afbeelding 1"/>
+          <p:cNvSpPr>
+            <a:spLocks noGrp="1" noRot="1" noChangeAspect="1"/>
+          </p:cNvSpPr>
+          <p:nvPr>
+            <p:ph type="sldImg"/>
+          </p:nvPr>
+        </p:nvSpPr>
+        <p:spPr/>
+      </p:sp>
+      <p:sp>
+        <p:nvSpPr>
+          <p:cNvPr id="3" name="Tijdelijke aanduiding voor notities 2"/>
+          <p:cNvSpPr>
+            <a:spLocks noGrp="1"/>
+          </p:cNvSpPr>
+          <p:nvPr>
+            <p:ph type="body" idx="1"/>
+          </p:nvPr>
+        </p:nvSpPr>
+        <p:spPr/>
+        <p:txBody>
+          <a:bodyPr/>
+          <a:lstStyle/>
+          <a:p>
+            <a:pPr marL="0" marR="0" lvl="0" indent="0" algn="l" defTabSz="914400" rtl="0" eaLnBrk="1" fontAlgn="auto" latinLnBrk="0" hangingPunct="1">
+              <a:lnSpc>
+                <a:spcPct val="100000"/>
+              </a:lnSpc>
+              <a:spcBef>
+                <a:spcPts val="0"/>
+              </a:spcBef>
+              <a:spcAft>
+                <a:spcPts val="0"/>
+              </a:spcAft>
+              <a:buClrTx/>
+              <a:buSzTx/>
+              <a:buFontTx/>
+              <a:buNone/>
+              <a:tabLst/>
+              <a:defRPr/>
+            </a:pPr>
+            <a:r>
+              <a:rPr lang="en-US" i="1" dirty="0">
+                <a:solidFill>
+                  <a:schemeClr val="bg1">
+                    <a:lumMod val="75000"/>
+                  </a:schemeClr>
+                </a:solidFill>
+              </a:rPr>
+              <a:t>How does your agent explore the world ( how does it traverse the world, when and why does it visit houses, does it have a memory?)?</a:t>
+            </a:r>
+          </a:p>
+          <a:p>
+            <a:endParaRPr lang="nl-BE" dirty="0"/>
+          </a:p>
+        </p:txBody>
+      </p:sp>
+      <p:sp>
+        <p:nvSpPr>
+          <p:cNvPr id="4" name="Tijdelijke aanduiding voor dianummer 3"/>
+          <p:cNvSpPr>
+            <a:spLocks noGrp="1"/>
+          </p:cNvSpPr>
+          <p:nvPr>
+            <p:ph type="sldNum" sz="quarter" idx="5"/>
+          </p:nvPr>
+        </p:nvSpPr>
+        <p:spPr/>
+        <p:txBody>
+          <a:bodyPr/>
+          <a:lstStyle/>
+          <a:p>
+            <a:fld id="{85A79062-8951-4794-A108-17A6DB70DC73}" type="slidenum">
+              <a:rPr lang="nl-BE" smtClean="0"/>
+              <a:t>6</a:t>
+            </a:fld>
+            <a:endParaRPr lang="nl-BE"/>
+          </a:p>
+        </p:txBody>
+      </p:sp>
+    </p:spTree>
+    <p:extLst>
+      <p:ext uri="{BB962C8B-B14F-4D97-AF65-F5344CB8AC3E}">
+        <p14:creationId xmlns:p14="http://schemas.microsoft.com/office/powerpoint/2010/main" val="2955903671"/>
+      </p:ext>
+    </p:extLst>
+  </p:cSld>
+  <p:clrMapOvr>
+    <a:masterClrMapping/>
+  </p:clrMapOvr>
+</p:notes>
+</file>
+
 <file path=ppt/slideLayouts/slideLayout1.xml><?xml version="1.0" encoding="utf-8"?>
 <p:sldLayout xmlns:a="http://schemas.openxmlformats.org/drawingml/2006/main" xmlns:r="http://schemas.openxmlformats.org/officeDocument/2006/relationships" xmlns:p="http://schemas.openxmlformats.org/presentationml/2006/main" type="title" preserve="1">
   <p:cSld name="Title Slide">
@@ -405,7 +1238,7 @@
           <a:p>
             <a:fld id="{82085877-2B37-48E7-8B6D-4D4ED486130A}" type="datetimeFigureOut">
               <a:rPr lang="en-BE" smtClean="0"/>
-              <a:t>11/28/2023</a:t>
+              <a:t>06/06/2026</a:t>
             </a:fld>
             <a:endParaRPr lang="en-BE"/>
           </a:p>
@@ -459,7 +1292,7 @@
           <a:p>
             <a:fld id="{F15161DE-E191-4798-91BE-355EA90292A5}" type="slidenum">
               <a:rPr lang="en-BE" smtClean="0"/>
-              <a:t>‹#›</a:t>
+              <a:t>‹nr.›</a:t>
             </a:fld>
             <a:endParaRPr lang="en-BE"/>
           </a:p>
@@ -605,7 +1438,7 @@
           <a:p>
             <a:fld id="{82085877-2B37-48E7-8B6D-4D4ED486130A}" type="datetimeFigureOut">
               <a:rPr lang="en-BE" smtClean="0"/>
-              <a:t>11/28/2023</a:t>
+              <a:t>06/06/2026</a:t>
             </a:fld>
             <a:endParaRPr lang="en-BE"/>
           </a:p>
@@ -659,7 +1492,7 @@
           <a:p>
             <a:fld id="{F15161DE-E191-4798-91BE-355EA90292A5}" type="slidenum">
               <a:rPr lang="en-BE" smtClean="0"/>
-              <a:t>‹#›</a:t>
+              <a:t>‹nr.›</a:t>
             </a:fld>
             <a:endParaRPr lang="en-BE"/>
           </a:p>
@@ -815,7 +1648,7 @@
           <a:p>
             <a:fld id="{82085877-2B37-48E7-8B6D-4D4ED486130A}" type="datetimeFigureOut">
               <a:rPr lang="en-BE" smtClean="0"/>
-              <a:t>11/28/2023</a:t>
+              <a:t>06/06/2026</a:t>
             </a:fld>
             <a:endParaRPr lang="en-BE"/>
           </a:p>
@@ -869,7 +1702,7 @@
           <a:p>
             <a:fld id="{F15161DE-E191-4798-91BE-355EA90292A5}" type="slidenum">
               <a:rPr lang="en-BE" smtClean="0"/>
-              <a:t>‹#›</a:t>
+              <a:t>‹nr.›</a:t>
             </a:fld>
             <a:endParaRPr lang="en-BE"/>
           </a:p>
@@ -1015,7 +1848,7 @@
           <a:p>
             <a:fld id="{82085877-2B37-48E7-8B6D-4D4ED486130A}" type="datetimeFigureOut">
               <a:rPr lang="en-BE" smtClean="0"/>
-              <a:t>11/28/2023</a:t>
+              <a:t>06/06/2026</a:t>
             </a:fld>
             <a:endParaRPr lang="en-BE"/>
           </a:p>
@@ -1069,7 +1902,7 @@
           <a:p>
             <a:fld id="{F15161DE-E191-4798-91BE-355EA90292A5}" type="slidenum">
               <a:rPr lang="en-BE" smtClean="0"/>
-              <a:t>‹#›</a:t>
+              <a:t>‹nr.›</a:t>
             </a:fld>
             <a:endParaRPr lang="en-BE"/>
           </a:p>
@@ -1291,7 +2124,7 @@
           <a:p>
             <a:fld id="{82085877-2B37-48E7-8B6D-4D4ED486130A}" type="datetimeFigureOut">
               <a:rPr lang="en-BE" smtClean="0"/>
-              <a:t>11/28/2023</a:t>
+              <a:t>06/06/2026</a:t>
             </a:fld>
             <a:endParaRPr lang="en-BE"/>
           </a:p>
@@ -1345,7 +2178,7 @@
           <a:p>
             <a:fld id="{F15161DE-E191-4798-91BE-355EA90292A5}" type="slidenum">
               <a:rPr lang="en-BE" smtClean="0"/>
-              <a:t>‹#›</a:t>
+              <a:t>‹nr.›</a:t>
             </a:fld>
             <a:endParaRPr lang="en-BE"/>
           </a:p>
@@ -1559,7 +2392,7 @@
           <a:p>
             <a:fld id="{82085877-2B37-48E7-8B6D-4D4ED486130A}" type="datetimeFigureOut">
               <a:rPr lang="en-BE" smtClean="0"/>
-              <a:t>11/28/2023</a:t>
+              <a:t>06/06/2026</a:t>
             </a:fld>
             <a:endParaRPr lang="en-BE"/>
           </a:p>
@@ -1613,7 +2446,7 @@
           <a:p>
             <a:fld id="{F15161DE-E191-4798-91BE-355EA90292A5}" type="slidenum">
               <a:rPr lang="en-BE" smtClean="0"/>
-              <a:t>‹#›</a:t>
+              <a:t>‹nr.›</a:t>
             </a:fld>
             <a:endParaRPr lang="en-BE"/>
           </a:p>
@@ -1974,7 +2807,7 @@
           <a:p>
             <a:fld id="{82085877-2B37-48E7-8B6D-4D4ED486130A}" type="datetimeFigureOut">
               <a:rPr lang="en-BE" smtClean="0"/>
-              <a:t>11/28/2023</a:t>
+              <a:t>06/06/2026</a:t>
             </a:fld>
             <a:endParaRPr lang="en-BE"/>
           </a:p>
@@ -2028,7 +2861,7 @@
           <a:p>
             <a:fld id="{F15161DE-E191-4798-91BE-355EA90292A5}" type="slidenum">
               <a:rPr lang="en-BE" smtClean="0"/>
-              <a:t>‹#›</a:t>
+              <a:t>‹nr.›</a:t>
             </a:fld>
             <a:endParaRPr lang="en-BE"/>
           </a:p>
@@ -2116,7 +2949,7 @@
           <a:p>
             <a:fld id="{82085877-2B37-48E7-8B6D-4D4ED486130A}" type="datetimeFigureOut">
               <a:rPr lang="en-BE" smtClean="0"/>
-              <a:t>11/28/2023</a:t>
+              <a:t>06/06/2026</a:t>
             </a:fld>
             <a:endParaRPr lang="en-BE"/>
           </a:p>
@@ -2170,7 +3003,7 @@
           <a:p>
             <a:fld id="{F15161DE-E191-4798-91BE-355EA90292A5}" type="slidenum">
               <a:rPr lang="en-BE" smtClean="0"/>
-              <a:t>‹#›</a:t>
+              <a:t>‹nr.›</a:t>
             </a:fld>
             <a:endParaRPr lang="en-BE"/>
           </a:p>
@@ -2229,7 +3062,7 @@
           <a:p>
             <a:fld id="{82085877-2B37-48E7-8B6D-4D4ED486130A}" type="datetimeFigureOut">
               <a:rPr lang="en-BE" smtClean="0"/>
-              <a:t>11/28/2023</a:t>
+              <a:t>06/06/2026</a:t>
             </a:fld>
             <a:endParaRPr lang="en-BE"/>
           </a:p>
@@ -2283,7 +3116,7 @@
           <a:p>
             <a:fld id="{F15161DE-E191-4798-91BE-355EA90292A5}" type="slidenum">
               <a:rPr lang="en-BE" smtClean="0"/>
-              <a:t>‹#›</a:t>
+              <a:t>‹nr.›</a:t>
             </a:fld>
             <a:endParaRPr lang="en-BE"/>
           </a:p>
@@ -2542,7 +3375,7 @@
           <a:p>
             <a:fld id="{82085877-2B37-48E7-8B6D-4D4ED486130A}" type="datetimeFigureOut">
               <a:rPr lang="en-BE" smtClean="0"/>
-              <a:t>11/28/2023</a:t>
+              <a:t>06/06/2026</a:t>
             </a:fld>
             <a:endParaRPr lang="en-BE"/>
           </a:p>
@@ -2596,7 +3429,7 @@
           <a:p>
             <a:fld id="{F15161DE-E191-4798-91BE-355EA90292A5}" type="slidenum">
               <a:rPr lang="en-BE" smtClean="0"/>
-              <a:t>‹#›</a:t>
+              <a:t>‹nr.›</a:t>
             </a:fld>
             <a:endParaRPr lang="en-BE"/>
           </a:p>
@@ -2831,7 +3664,7 @@
           <a:p>
             <a:fld id="{82085877-2B37-48E7-8B6D-4D4ED486130A}" type="datetimeFigureOut">
               <a:rPr lang="en-BE" smtClean="0"/>
-              <a:t>11/28/2023</a:t>
+              <a:t>06/06/2026</a:t>
             </a:fld>
             <a:endParaRPr lang="en-BE"/>
           </a:p>
@@ -2885,7 +3718,7 @@
           <a:p>
             <a:fld id="{F15161DE-E191-4798-91BE-355EA90292A5}" type="slidenum">
               <a:rPr lang="en-BE" smtClean="0"/>
-              <a:t>‹#›</a:t>
+              <a:t>‹nr.›</a:t>
             </a:fld>
             <a:endParaRPr lang="en-BE"/>
           </a:p>
@@ -3074,7 +3907,7 @@
           <a:p>
             <a:fld id="{82085877-2B37-48E7-8B6D-4D4ED486130A}" type="datetimeFigureOut">
               <a:rPr lang="en-BE" smtClean="0"/>
-              <a:t>11/28/2023</a:t>
+              <a:t>06/06/2026</a:t>
             </a:fld>
             <a:endParaRPr lang="en-BE"/>
           </a:p>
@@ -3164,7 +3997,7 @@
           <a:p>
             <a:fld id="{F15161DE-E191-4798-91BE-355EA90292A5}" type="slidenum">
               <a:rPr lang="en-BE" smtClean="0"/>
-              <a:t>‹#›</a:t>
+              <a:t>‹nr.›</a:t>
             </a:fld>
             <a:endParaRPr lang="en-BE"/>
           </a:p>
@@ -3538,38 +4371,16 @@
         </p:nvSpPr>
         <p:spPr/>
         <p:txBody>
-          <a:bodyPr/>
-          <a:lstStyle/>
-          <a:p>
-            <a:r>
-              <a:rPr lang="en-US" i="1">
-                <a:solidFill>
-                  <a:schemeClr val="bg1">
-                    <a:lumMod val="75000"/>
-                  </a:schemeClr>
-                </a:solidFill>
-              </a:rPr>
-              <a:t>Delete all comments after reading</a:t>
-            </a:r>
-          </a:p>
-          <a:p>
-            <a:r>
-              <a:rPr lang="en-US" i="1">
-                <a:solidFill>
-                  <a:schemeClr val="bg1">
-                    <a:lumMod val="75000"/>
-                  </a:schemeClr>
-                </a:solidFill>
-              </a:rPr>
-              <a:t>You are not allowed to add more slides to this presentation</a:t>
-            </a:r>
-            <a:endParaRPr lang="en-BE" i="1">
-              <a:solidFill>
-                <a:schemeClr val="bg1">
-                  <a:lumMod val="75000"/>
-                </a:schemeClr>
-              </a:solidFill>
-            </a:endParaRPr>
+          <a:bodyPr>
+            <a:normAutofit/>
+          </a:bodyPr>
+          <a:lstStyle/>
+          <a:p>
+            <a:r>
+              <a:rPr lang="en-US" sz="4400" b="1" dirty="0"/>
+              <a:t>DRIES FIERENS</a:t>
+            </a:r>
+            <a:endParaRPr lang="en-BE" sz="4400" b="1" dirty="0"/>
           </a:p>
         </p:txBody>
       </p:sp>
@@ -3632,60 +4443,36 @@
           </a:p>
         </p:txBody>
       </p:sp>
-      <p:sp>
-        <p:nvSpPr>
-          <p:cNvPr id="3" name="Content Placeholder 2">
-            <a:extLst>
-              <a:ext uri="{FF2B5EF4-FFF2-40B4-BE49-F238E27FC236}">
-                <a16:creationId xmlns:a16="http://schemas.microsoft.com/office/drawing/2014/main" id="{64915428-ACD8-4B22-96DC-2806680ED3AB}"/>
-              </a:ext>
-            </a:extLst>
-          </p:cNvPr>
-          <p:cNvSpPr>
-            <a:spLocks noGrp="1"/>
-          </p:cNvSpPr>
-          <p:nvPr>
-            <p:ph idx="1"/>
-          </p:nvPr>
-        </p:nvSpPr>
-        <p:spPr/>
-        <p:txBody>
-          <a:bodyPr/>
-          <a:lstStyle/>
-          <a:p>
-            <a:r>
-              <a:rPr lang="en-US" i="1" dirty="0">
-                <a:solidFill>
-                  <a:schemeClr val="bg1">
-                    <a:lumMod val="75000"/>
-                  </a:schemeClr>
-                </a:solidFill>
-              </a:rPr>
-              <a:t>Visualization of your decision making structure (readable!)</a:t>
-            </a:r>
-          </a:p>
-          <a:p>
-            <a:pPr lvl="1"/>
-            <a:r>
-              <a:rPr lang="en-US" i="1" dirty="0">
-                <a:solidFill>
-                  <a:schemeClr val="bg1">
-                    <a:lumMod val="75000"/>
-                  </a:schemeClr>
-                </a:solidFill>
-              </a:rPr>
-              <a:t>Tip: use miro.com!</a:t>
-            </a:r>
-            <a:endParaRPr lang="en-BE" i="1" dirty="0">
-              <a:solidFill>
-                <a:schemeClr val="bg1">
-                  <a:lumMod val="75000"/>
-                </a:schemeClr>
-              </a:solidFill>
-            </a:endParaRPr>
-          </a:p>
-        </p:txBody>
-      </p:sp>
+      <p:pic>
+        <p:nvPicPr>
+          <p:cNvPr id="7" name="Afbeelding 6">
+            <a:extLst>
+              <a:ext uri="{FF2B5EF4-FFF2-40B4-BE49-F238E27FC236}">
+                <a16:creationId xmlns:a16="http://schemas.microsoft.com/office/drawing/2014/main" id="{9A84C4AE-949B-B99F-A69A-B4300F5B9F1D}"/>
+              </a:ext>
+            </a:extLst>
+          </p:cNvPr>
+          <p:cNvPicPr>
+            <a:picLocks noChangeAspect="1"/>
+          </p:cNvPicPr>
+          <p:nvPr/>
+        </p:nvPicPr>
+        <p:blipFill>
+          <a:blip r:embed="rId3"/>
+          <a:stretch>
+            <a:fillRect/>
+          </a:stretch>
+        </p:blipFill>
+        <p:spPr>
+          <a:xfrm>
+            <a:off x="312462" y="2450319"/>
+            <a:ext cx="11567076" cy="3332963"/>
+          </a:xfrm>
+          <a:prstGeom prst="rect">
+            <a:avLst/>
+          </a:prstGeom>
+        </p:spPr>
+      </p:pic>
     </p:spTree>
     <p:extLst>
       <p:ext uri="{BB962C8B-B14F-4D97-AF65-F5344CB8AC3E}">
@@ -3745,60 +4532,36 @@
           </a:p>
         </p:txBody>
       </p:sp>
-      <p:sp>
-        <p:nvSpPr>
-          <p:cNvPr id="3" name="Content Placeholder 2">
-            <a:extLst>
-              <a:ext uri="{FF2B5EF4-FFF2-40B4-BE49-F238E27FC236}">
-                <a16:creationId xmlns:a16="http://schemas.microsoft.com/office/drawing/2014/main" id="{64915428-ACD8-4B22-96DC-2806680ED3AB}"/>
-              </a:ext>
-            </a:extLst>
-          </p:cNvPr>
-          <p:cNvSpPr>
-            <a:spLocks noGrp="1"/>
-          </p:cNvSpPr>
-          <p:nvPr>
-            <p:ph idx="1"/>
-          </p:nvPr>
-        </p:nvSpPr>
-        <p:spPr/>
-        <p:txBody>
-          <a:bodyPr/>
-          <a:lstStyle/>
-          <a:p>
-            <a:r>
-              <a:rPr lang="en-US" i="1">
-                <a:solidFill>
-                  <a:schemeClr val="bg1">
-                    <a:lumMod val="75000"/>
-                  </a:schemeClr>
-                </a:solidFill>
-              </a:rPr>
-              <a:t>How does your agent deal with enemies (aiming, shooting, item usage, avoidance, hiding, usage of sprint, …)?</a:t>
-            </a:r>
-            <a:endParaRPr lang="en-BE" i="1">
-              <a:solidFill>
-                <a:schemeClr val="bg1">
-                  <a:lumMod val="75000"/>
-                </a:schemeClr>
-              </a:solidFill>
-            </a:endParaRPr>
-          </a:p>
-          <a:p>
-            <a:r>
-              <a:rPr lang="en-US" i="1">
-                <a:solidFill>
-                  <a:schemeClr val="bg1">
-                    <a:lumMod val="75000"/>
-                  </a:schemeClr>
-                </a:solidFill>
-              </a:rPr>
-              <a:t>USE IMAGES/GIFS</a:t>
-            </a:r>
-            <a:endParaRPr lang="en-BE"/>
-          </a:p>
-        </p:txBody>
-      </p:sp>
+      <p:pic>
+        <p:nvPicPr>
+          <p:cNvPr id="5" name="Afbeelding 4">
+            <a:extLst>
+              <a:ext uri="{FF2B5EF4-FFF2-40B4-BE49-F238E27FC236}">
+                <a16:creationId xmlns:a16="http://schemas.microsoft.com/office/drawing/2014/main" id="{A261CF16-1710-A8C6-CBC6-3C4298094B80}"/>
+              </a:ext>
+            </a:extLst>
+          </p:cNvPr>
+          <p:cNvPicPr>
+            <a:picLocks noChangeAspect="1"/>
+          </p:cNvPicPr>
+          <p:nvPr/>
+        </p:nvPicPr>
+        <p:blipFill>
+          <a:blip r:embed="rId2"/>
+          <a:stretch>
+            <a:fillRect/>
+          </a:stretch>
+        </p:blipFill>
+        <p:spPr>
+          <a:xfrm>
+            <a:off x="434058" y="3245199"/>
+            <a:ext cx="4684208" cy="1479224"/>
+          </a:xfrm>
+          <a:prstGeom prst="rect">
+            <a:avLst/>
+          </a:prstGeom>
+        </p:spPr>
+      </p:pic>
     </p:spTree>
     <p:extLst>
       <p:ext uri="{BB962C8B-B14F-4D97-AF65-F5344CB8AC3E}">
@@ -3858,50 +4621,36 @@
           </a:p>
         </p:txBody>
       </p:sp>
-      <p:sp>
-        <p:nvSpPr>
-          <p:cNvPr id="3" name="Content Placeholder 2">
-            <a:extLst>
-              <a:ext uri="{FF2B5EF4-FFF2-40B4-BE49-F238E27FC236}">
-                <a16:creationId xmlns:a16="http://schemas.microsoft.com/office/drawing/2014/main" id="{64915428-ACD8-4B22-96DC-2806680ED3AB}"/>
-              </a:ext>
-            </a:extLst>
-          </p:cNvPr>
-          <p:cNvSpPr>
-            <a:spLocks noGrp="1"/>
-          </p:cNvSpPr>
-          <p:nvPr>
-            <p:ph idx="1"/>
-          </p:nvPr>
-        </p:nvSpPr>
-        <p:spPr/>
-        <p:txBody>
-          <a:bodyPr/>
-          <a:lstStyle/>
-          <a:p>
-            <a:r>
-              <a:rPr lang="en-US" i="1" dirty="0">
-                <a:solidFill>
-                  <a:schemeClr val="bg1">
-                    <a:lumMod val="75000"/>
-                  </a:schemeClr>
-                </a:solidFill>
-              </a:rPr>
-              <a:t>How does your agent manage the inventory (inventory organization, item usage, picking up and remembering items,…)? </a:t>
-            </a:r>
-            <a:endParaRPr lang="en-BE" i="1" dirty="0">
-              <a:solidFill>
-                <a:schemeClr val="bg1">
-                  <a:lumMod val="75000"/>
-                </a:schemeClr>
-              </a:solidFill>
-            </a:endParaRPr>
-          </a:p>
-          <a:p>
-            <a:endParaRPr lang="en-BE" dirty="0"/>
-          </a:p>
-        </p:txBody>
-      </p:sp>
+      <p:pic>
+        <p:nvPicPr>
+          <p:cNvPr id="5" name="Afbeelding 4">
+            <a:extLst>
+              <a:ext uri="{FF2B5EF4-FFF2-40B4-BE49-F238E27FC236}">
+                <a16:creationId xmlns:a16="http://schemas.microsoft.com/office/drawing/2014/main" id="{198DB0A2-075C-5174-72FF-192D32DE006C}"/>
+              </a:ext>
+            </a:extLst>
+          </p:cNvPr>
+          <p:cNvPicPr>
+            <a:picLocks noChangeAspect="1"/>
+          </p:cNvPicPr>
+          <p:nvPr/>
+        </p:nvPicPr>
+        <p:blipFill>
+          <a:blip r:embed="rId3"/>
+          <a:stretch>
+            <a:fillRect/>
+          </a:stretch>
+        </p:blipFill>
+        <p:spPr>
+          <a:xfrm>
+            <a:off x="587825" y="2480376"/>
+            <a:ext cx="4430980" cy="2970398"/>
+          </a:xfrm>
+          <a:prstGeom prst="rect">
+            <a:avLst/>
+          </a:prstGeom>
+        </p:spPr>
+      </p:pic>
     </p:spTree>
     <p:extLst>
       <p:ext uri="{BB962C8B-B14F-4D97-AF65-F5344CB8AC3E}">
@@ -3920,7 +4669,13 @@
   <p:cSld>
     <p:spTree>
       <p:nvGrpSpPr>
-        <p:cNvPr id="1" name=""/>
+        <p:cNvPr id="1" name="">
+          <a:extLst>
+            <a:ext uri="{FF2B5EF4-FFF2-40B4-BE49-F238E27FC236}">
+              <a16:creationId xmlns:a16="http://schemas.microsoft.com/office/drawing/2014/main" id="{B9C3CFD4-5E7B-CBD7-B7D1-B59999D26D07}"/>
+            </a:ext>
+          </a:extLst>
+        </p:cNvPr>
         <p:cNvGrpSpPr/>
         <p:nvPr/>
       </p:nvGrpSpPr>
@@ -3937,7 +4692,7 @@
           <p:cNvPr id="2" name="Title 1">
             <a:extLst>
               <a:ext uri="{FF2B5EF4-FFF2-40B4-BE49-F238E27FC236}">
-                <a16:creationId xmlns:a16="http://schemas.microsoft.com/office/drawing/2014/main" id="{EF6BB071-C63E-40D3-93C6-9F99F27862FE}"/>
+                <a16:creationId xmlns:a16="http://schemas.microsoft.com/office/drawing/2014/main" id="{43AB4535-273A-4FF4-8B51-EC678399C7E1}"/>
               </a:ext>
             </a:extLst>
           </p:cNvPr>
@@ -3963,55 +4718,68 @@
       </p:sp>
       <p:sp>
         <p:nvSpPr>
-          <p:cNvPr id="3" name="Content Placeholder 2">
-            <a:extLst>
-              <a:ext uri="{FF2B5EF4-FFF2-40B4-BE49-F238E27FC236}">
-                <a16:creationId xmlns:a16="http://schemas.microsoft.com/office/drawing/2014/main" id="{64915428-ACD8-4B22-96DC-2806680ED3AB}"/>
-              </a:ext>
-            </a:extLst>
-          </p:cNvPr>
-          <p:cNvSpPr>
-            <a:spLocks noGrp="1"/>
-          </p:cNvSpPr>
-          <p:nvPr>
-            <p:ph idx="1"/>
-          </p:nvPr>
-        </p:nvSpPr>
-        <p:spPr/>
-        <p:txBody>
-          <a:bodyPr/>
-          <a:lstStyle/>
-          <a:p>
-            <a:r>
-              <a:rPr lang="en-US" i="1" dirty="0">
-                <a:solidFill>
-                  <a:schemeClr val="bg1">
-                    <a:lumMod val="75000"/>
-                  </a:schemeClr>
-                </a:solidFill>
-              </a:rPr>
-              <a:t>How many steering behaviors does it use? Does it use blended steering?</a:t>
-            </a:r>
-            <a:endParaRPr lang="en-BE" i="1" dirty="0">
-              <a:solidFill>
-                <a:schemeClr val="bg1">
-                  <a:lumMod val="75000"/>
-                </a:schemeClr>
-              </a:solidFill>
-            </a:endParaRPr>
-          </a:p>
-          <a:p>
-            <a:pPr marL="0" indent="0">
-              <a:buNone/>
-            </a:pPr>
-            <a:endParaRPr lang="en-BE" dirty="0"/>
+          <p:cNvPr id="5" name="Tekstvak 4">
+            <a:extLst>
+              <a:ext uri="{FF2B5EF4-FFF2-40B4-BE49-F238E27FC236}">
+                <a16:creationId xmlns:a16="http://schemas.microsoft.com/office/drawing/2014/main" id="{15174528-3D74-7DBC-12BA-8FEF48E863B5}"/>
+              </a:ext>
+            </a:extLst>
+          </p:cNvPr>
+          <p:cNvSpPr txBox="1"/>
+          <p:nvPr/>
+        </p:nvSpPr>
+        <p:spPr>
+          <a:xfrm>
+            <a:off x="4351930" y="1690688"/>
+            <a:ext cx="2846870" cy="369332"/>
+          </a:xfrm>
+          <a:prstGeom prst="rect">
+            <a:avLst/>
+          </a:prstGeom>
+          <a:noFill/>
+        </p:spPr>
+        <p:txBody>
+          <a:bodyPr wrap="none" rtlCol="0">
+            <a:spAutoFit/>
+          </a:bodyPr>
+          <a:lstStyle/>
+          <a:p>
+            <a:r>
+              <a:rPr lang="nl-BE" dirty="0" err="1"/>
+              <a:t>Seek</a:t>
+            </a:r>
+            <a:r>
+              <a:rPr lang="nl-BE" dirty="0"/>
+              <a:t>, </a:t>
+            </a:r>
+            <a:r>
+              <a:rPr lang="nl-BE" dirty="0" err="1"/>
+              <a:t>Wander</a:t>
+            </a:r>
+            <a:r>
+              <a:rPr lang="nl-BE" dirty="0"/>
+              <a:t>, Face </a:t>
+            </a:r>
+            <a:r>
+              <a:rPr lang="nl-BE" dirty="0" err="1"/>
+              <a:t>and</a:t>
+            </a:r>
+            <a:r>
+              <a:rPr lang="nl-BE" dirty="0"/>
+              <a:t> </a:t>
+            </a:r>
+            <a:r>
+              <a:rPr lang="nl-BE" b="1" dirty="0" err="1"/>
+              <a:t>Flee</a:t>
+            </a:r>
+            <a:endParaRPr lang="nl-BE" b="1" dirty="0"/>
           </a:p>
         </p:txBody>
       </p:sp>
     </p:spTree>
     <p:extLst>
       <p:ext uri="{BB962C8B-B14F-4D97-AF65-F5344CB8AC3E}">
-        <p14:creationId xmlns:p14="http://schemas.microsoft.com/office/powerpoint/2010/main" val="3267762851"/>
+        <p14:creationId xmlns:p14="http://schemas.microsoft.com/office/powerpoint/2010/main" val="419767951"/>
       </p:ext>
     </p:extLst>
   </p:cSld>
@@ -4071,165 +4839,40 @@
           </a:p>
         </p:txBody>
       </p:sp>
-      <p:sp>
-        <p:nvSpPr>
-          <p:cNvPr id="3" name="Content Placeholder 2">
-            <a:extLst>
-              <a:ext uri="{FF2B5EF4-FFF2-40B4-BE49-F238E27FC236}">
-                <a16:creationId xmlns:a16="http://schemas.microsoft.com/office/drawing/2014/main" id="{64915428-ACD8-4B22-96DC-2806680ED3AB}"/>
-              </a:ext>
-            </a:extLst>
-          </p:cNvPr>
-          <p:cNvSpPr>
-            <a:spLocks noGrp="1"/>
-          </p:cNvSpPr>
-          <p:nvPr>
-            <p:ph idx="1"/>
-          </p:nvPr>
-        </p:nvSpPr>
-        <p:spPr/>
-        <p:txBody>
-          <a:bodyPr/>
-          <a:lstStyle/>
-          <a:p>
-            <a:r>
-              <a:rPr lang="en-US" i="1" dirty="0">
-                <a:solidFill>
-                  <a:schemeClr val="bg1">
-                    <a:lumMod val="75000"/>
-                  </a:schemeClr>
-                </a:solidFill>
-              </a:rPr>
-              <a:t>How does your agent explore the world ( how does it traverse the world, when and why does it visit houses, does it have a memory?)?</a:t>
-            </a:r>
-          </a:p>
-          <a:p>
-            <a:r>
-              <a:rPr lang="en-US" i="1" dirty="0">
-                <a:solidFill>
-                  <a:schemeClr val="bg1">
-                    <a:lumMod val="75000"/>
-                  </a:schemeClr>
-                </a:solidFill>
-              </a:rPr>
-              <a:t>USE IMAGES/GIFS</a:t>
-            </a:r>
-          </a:p>
-          <a:p>
-            <a:pPr marL="0" indent="0">
-              <a:buNone/>
-            </a:pPr>
-            <a:endParaRPr lang="en-BE" dirty="0"/>
-          </a:p>
-        </p:txBody>
-      </p:sp>
+      <p:pic>
+        <p:nvPicPr>
+          <p:cNvPr id="5" name="Afbeelding 4">
+            <a:extLst>
+              <a:ext uri="{FF2B5EF4-FFF2-40B4-BE49-F238E27FC236}">
+                <a16:creationId xmlns:a16="http://schemas.microsoft.com/office/drawing/2014/main" id="{122E8645-D3D4-2FE0-29EE-179F24A3B0CA}"/>
+              </a:ext>
+            </a:extLst>
+          </p:cNvPr>
+          <p:cNvPicPr>
+            <a:picLocks noChangeAspect="1"/>
+          </p:cNvPicPr>
+          <p:nvPr/>
+        </p:nvPicPr>
+        <p:blipFill>
+          <a:blip r:embed="rId3"/>
+          <a:stretch>
+            <a:fillRect/>
+          </a:stretch>
+        </p:blipFill>
+        <p:spPr>
+          <a:xfrm>
+            <a:off x="640548" y="3264176"/>
+            <a:ext cx="5455452" cy="1507822"/>
+          </a:xfrm>
+          <a:prstGeom prst="rect">
+            <a:avLst/>
+          </a:prstGeom>
+        </p:spPr>
+      </p:pic>
     </p:spTree>
     <p:extLst>
       <p:ext uri="{BB962C8B-B14F-4D97-AF65-F5344CB8AC3E}">
         <p14:creationId xmlns:p14="http://schemas.microsoft.com/office/powerpoint/2010/main" val="1652142467"/>
-      </p:ext>
-    </p:extLst>
-  </p:cSld>
-  <p:clrMapOvr>
-    <a:masterClrMapping/>
-  </p:clrMapOvr>
-</p:sld>
-</file>
-
-<file path=ppt/slides/slide7.xml><?xml version="1.0" encoding="utf-8"?>
-<p:sld xmlns:a="http://schemas.openxmlformats.org/drawingml/2006/main" xmlns:r="http://schemas.openxmlformats.org/officeDocument/2006/relationships" xmlns:p="http://schemas.openxmlformats.org/presentationml/2006/main">
-  <p:cSld>
-    <p:spTree>
-      <p:nvGrpSpPr>
-        <p:cNvPr id="1" name=""/>
-        <p:cNvGrpSpPr/>
-        <p:nvPr/>
-      </p:nvGrpSpPr>
-      <p:grpSpPr>
-        <a:xfrm>
-          <a:off x="0" y="0"/>
-          <a:ext cx="0" cy="0"/>
-          <a:chOff x="0" y="0"/>
-          <a:chExt cx="0" cy="0"/>
-        </a:xfrm>
-      </p:grpSpPr>
-      <p:sp>
-        <p:nvSpPr>
-          <p:cNvPr id="2" name="Title 1">
-            <a:extLst>
-              <a:ext uri="{FF2B5EF4-FFF2-40B4-BE49-F238E27FC236}">
-                <a16:creationId xmlns:a16="http://schemas.microsoft.com/office/drawing/2014/main" id="{EF6BB071-C63E-40D3-93C6-9F99F27862FE}"/>
-              </a:ext>
-            </a:extLst>
-          </p:cNvPr>
-          <p:cNvSpPr>
-            <a:spLocks noGrp="1"/>
-          </p:cNvSpPr>
-          <p:nvPr>
-            <p:ph type="title"/>
-          </p:nvPr>
-        </p:nvSpPr>
-        <p:spPr/>
-        <p:txBody>
-          <a:bodyPr/>
-          <a:lstStyle/>
-          <a:p>
-            <a:r>
-              <a:rPr lang="en-US"/>
-              <a:t>High Score</a:t>
-            </a:r>
-            <a:endParaRPr lang="en-BE"/>
-          </a:p>
-        </p:txBody>
-      </p:sp>
-      <p:sp>
-        <p:nvSpPr>
-          <p:cNvPr id="3" name="Content Placeholder 2">
-            <a:extLst>
-              <a:ext uri="{FF2B5EF4-FFF2-40B4-BE49-F238E27FC236}">
-                <a16:creationId xmlns:a16="http://schemas.microsoft.com/office/drawing/2014/main" id="{64915428-ACD8-4B22-96DC-2806680ED3AB}"/>
-              </a:ext>
-            </a:extLst>
-          </p:cNvPr>
-          <p:cNvSpPr>
-            <a:spLocks noGrp="1"/>
-          </p:cNvSpPr>
-          <p:nvPr>
-            <p:ph idx="1"/>
-          </p:nvPr>
-        </p:nvSpPr>
-        <p:spPr/>
-        <p:txBody>
-          <a:bodyPr/>
-          <a:lstStyle/>
-          <a:p>
-            <a:pPr marL="0" indent="0">
-              <a:buNone/>
-            </a:pPr>
-            <a:r>
-              <a:rPr lang="en-US">
-                <a:solidFill>
-                  <a:schemeClr val="bg1">
-                    <a:lumMod val="75000"/>
-                  </a:schemeClr>
-                </a:solidFill>
-              </a:rPr>
-              <a:t>Screen shot or list of highest scores</a:t>
-            </a:r>
-            <a:endParaRPr lang="en-BE">
-              <a:solidFill>
-                <a:schemeClr val="bg1">
-                  <a:lumMod val="75000"/>
-                </a:schemeClr>
-              </a:solidFill>
-            </a:endParaRPr>
-          </a:p>
-        </p:txBody>
-      </p:sp>
-    </p:spTree>
-    <p:extLst>
-      <p:ext uri="{BB962C8B-B14F-4D97-AF65-F5344CB8AC3E}">
-        <p14:creationId xmlns:p14="http://schemas.microsoft.com/office/powerpoint/2010/main" val="3423734040"/>
       </p:ext>
     </p:extLst>
   </p:cSld>
@@ -4534,16 +5177,302 @@
 </a:theme>
 </file>
 
-<file path=customXml/item1.xml><?xml version="1.0" encoding="utf-8"?>
-<?mso-contentType ?>
-<FormTemplates xmlns="http://schemas.microsoft.com/sharepoint/v3/contenttype/forms">
-  <Display>DocumentLibraryForm</Display>
-  <Edit>DocumentLibraryForm</Edit>
-  <New>DocumentLibraryForm</New>
-</FormTemplates>
+<file path=ppt/theme/theme2.xml><?xml version="1.0" encoding="utf-8"?>
+<a:theme xmlns:a="http://schemas.openxmlformats.org/drawingml/2006/main" name="Kantoorthema">
+  <a:themeElements>
+    <a:clrScheme name="Office">
+      <a:dk1>
+        <a:sysClr val="windowText" lastClr="000000"/>
+      </a:dk1>
+      <a:lt1>
+        <a:sysClr val="window" lastClr="FFFFFF"/>
+      </a:lt1>
+      <a:dk2>
+        <a:srgbClr val="44546A"/>
+      </a:dk2>
+      <a:lt2>
+        <a:srgbClr val="E7E6E6"/>
+      </a:lt2>
+      <a:accent1>
+        <a:srgbClr val="4472C4"/>
+      </a:accent1>
+      <a:accent2>
+        <a:srgbClr val="ED7D31"/>
+      </a:accent2>
+      <a:accent3>
+        <a:srgbClr val="A5A5A5"/>
+      </a:accent3>
+      <a:accent4>
+        <a:srgbClr val="FFC000"/>
+      </a:accent4>
+      <a:accent5>
+        <a:srgbClr val="5B9BD5"/>
+      </a:accent5>
+      <a:accent6>
+        <a:srgbClr val="70AD47"/>
+      </a:accent6>
+      <a:hlink>
+        <a:srgbClr val="0563C1"/>
+      </a:hlink>
+      <a:folHlink>
+        <a:srgbClr val="954F72"/>
+      </a:folHlink>
+    </a:clrScheme>
+    <a:fontScheme name="Office">
+      <a:majorFont>
+        <a:latin typeface="Calibri Light" panose="020F0302020204030204"/>
+        <a:ea typeface=""/>
+        <a:cs typeface=""/>
+        <a:font script="Jpan" typeface="游ゴシック Light"/>
+        <a:font script="Hang" typeface="맑은 고딕"/>
+        <a:font script="Hans" typeface="等线 Light"/>
+        <a:font script="Hant" typeface="新細明體"/>
+        <a:font script="Arab" typeface="Times New Roman"/>
+        <a:font script="Hebr" typeface="Times New Roman"/>
+        <a:font script="Thai" typeface="Angsana New"/>
+        <a:font script="Ethi" typeface="Nyala"/>
+        <a:font script="Beng" typeface="Vrinda"/>
+        <a:font script="Gujr" typeface="Shruti"/>
+        <a:font script="Khmr" typeface="MoolBoran"/>
+        <a:font script="Knda" typeface="Tunga"/>
+        <a:font script="Guru" typeface="Raavi"/>
+        <a:font script="Cans" typeface="Euphemia"/>
+        <a:font script="Cher" typeface="Plantagenet Cherokee"/>
+        <a:font script="Yiii" typeface="Microsoft Yi Baiti"/>
+        <a:font script="Tibt" typeface="Microsoft Himalaya"/>
+        <a:font script="Thaa" typeface="MV Boli"/>
+        <a:font script="Deva" typeface="Mangal"/>
+        <a:font script="Telu" typeface="Gautami"/>
+        <a:font script="Taml" typeface="Latha"/>
+        <a:font script="Syrc" typeface="Estrangelo Edessa"/>
+        <a:font script="Orya" typeface="Kalinga"/>
+        <a:font script="Mlym" typeface="Kartika"/>
+        <a:font script="Laoo" typeface="DokChampa"/>
+        <a:font script="Sinh" typeface="Iskoola Pota"/>
+        <a:font script="Mong" typeface="Mongolian Baiti"/>
+        <a:font script="Viet" typeface="Times New Roman"/>
+        <a:font script="Uigh" typeface="Microsoft Uighur"/>
+        <a:font script="Geor" typeface="Sylfaen"/>
+        <a:font script="Armn" typeface="Arial"/>
+        <a:font script="Bugi" typeface="Leelawadee UI"/>
+        <a:font script="Bopo" typeface="Microsoft JhengHei"/>
+        <a:font script="Java" typeface="Javanese Text"/>
+        <a:font script="Lisu" typeface="Segoe UI"/>
+        <a:font script="Mymr" typeface="Myanmar Text"/>
+        <a:font script="Nkoo" typeface="Ebrima"/>
+        <a:font script="Olck" typeface="Nirmala UI"/>
+        <a:font script="Osma" typeface="Ebrima"/>
+        <a:font script="Phag" typeface="Phagspa"/>
+        <a:font script="Syrn" typeface="Estrangelo Edessa"/>
+        <a:font script="Syrj" typeface="Estrangelo Edessa"/>
+        <a:font script="Syre" typeface="Estrangelo Edessa"/>
+        <a:font script="Sora" typeface="Nirmala UI"/>
+        <a:font script="Tale" typeface="Microsoft Tai Le"/>
+        <a:font script="Talu" typeface="Microsoft New Tai Lue"/>
+        <a:font script="Tfng" typeface="Ebrima"/>
+      </a:majorFont>
+      <a:minorFont>
+        <a:latin typeface="Calibri" panose="020F0502020204030204"/>
+        <a:ea typeface=""/>
+        <a:cs typeface=""/>
+        <a:font script="Jpan" typeface="游ゴシック"/>
+        <a:font script="Hang" typeface="맑은 고딕"/>
+        <a:font script="Hans" typeface="等线"/>
+        <a:font script="Hant" typeface="新細明體"/>
+        <a:font script="Arab" typeface="Arial"/>
+        <a:font script="Hebr" typeface="Arial"/>
+        <a:font script="Thai" typeface="Cordia New"/>
+        <a:font script="Ethi" typeface="Nyala"/>
+        <a:font script="Beng" typeface="Vrinda"/>
+        <a:font script="Gujr" typeface="Shruti"/>
+        <a:font script="Khmr" typeface="DaunPenh"/>
+        <a:font script="Knda" typeface="Tunga"/>
+        <a:font script="Guru" typeface="Raavi"/>
+        <a:font script="Cans" typeface="Euphemia"/>
+        <a:font script="Cher" typeface="Plantagenet Cherokee"/>
+        <a:font script="Yiii" typeface="Microsoft Yi Baiti"/>
+        <a:font script="Tibt" typeface="Microsoft Himalaya"/>
+        <a:font script="Thaa" typeface="MV Boli"/>
+        <a:font script="Deva" typeface="Mangal"/>
+        <a:font script="Telu" typeface="Gautami"/>
+        <a:font script="Taml" typeface="Latha"/>
+        <a:font script="Syrc" typeface="Estrangelo Edessa"/>
+        <a:font script="Orya" typeface="Kalinga"/>
+        <a:font script="Mlym" typeface="Kartika"/>
+        <a:font script="Laoo" typeface="DokChampa"/>
+        <a:font script="Sinh" typeface="Iskoola Pota"/>
+        <a:font script="Mong" typeface="Mongolian Baiti"/>
+        <a:font script="Viet" typeface="Arial"/>
+        <a:font script="Uigh" typeface="Microsoft Uighur"/>
+        <a:font script="Geor" typeface="Sylfaen"/>
+        <a:font script="Armn" typeface="Arial"/>
+        <a:font script="Bugi" typeface="Leelawadee UI"/>
+        <a:font script="Bopo" typeface="Microsoft JhengHei"/>
+        <a:font script="Java" typeface="Javanese Text"/>
+        <a:font script="Lisu" typeface="Segoe UI"/>
+        <a:font script="Mymr" typeface="Myanmar Text"/>
+        <a:font script="Nkoo" typeface="Ebrima"/>
+        <a:font script="Olck" typeface="Nirmala UI"/>
+        <a:font script="Osma" typeface="Ebrima"/>
+        <a:font script="Phag" typeface="Phagspa"/>
+        <a:font script="Syrn" typeface="Estrangelo Edessa"/>
+        <a:font script="Syrj" typeface="Estrangelo Edessa"/>
+        <a:font script="Syre" typeface="Estrangelo Edessa"/>
+        <a:font script="Sora" typeface="Nirmala UI"/>
+        <a:font script="Tale" typeface="Microsoft Tai Le"/>
+        <a:font script="Talu" typeface="Microsoft New Tai Lue"/>
+        <a:font script="Tfng" typeface="Ebrima"/>
+      </a:minorFont>
+    </a:fontScheme>
+    <a:fmtScheme name="Office">
+      <a:fillStyleLst>
+        <a:solidFill>
+          <a:schemeClr val="phClr"/>
+        </a:solidFill>
+        <a:gradFill rotWithShape="1">
+          <a:gsLst>
+            <a:gs pos="0">
+              <a:schemeClr val="phClr">
+                <a:lumMod val="110000"/>
+                <a:satMod val="105000"/>
+                <a:tint val="67000"/>
+              </a:schemeClr>
+            </a:gs>
+            <a:gs pos="50000">
+              <a:schemeClr val="phClr">
+                <a:lumMod val="105000"/>
+                <a:satMod val="103000"/>
+                <a:tint val="73000"/>
+              </a:schemeClr>
+            </a:gs>
+            <a:gs pos="100000">
+              <a:schemeClr val="phClr">
+                <a:lumMod val="105000"/>
+                <a:satMod val="109000"/>
+                <a:tint val="81000"/>
+              </a:schemeClr>
+            </a:gs>
+          </a:gsLst>
+          <a:lin ang="5400000" scaled="0"/>
+        </a:gradFill>
+        <a:gradFill rotWithShape="1">
+          <a:gsLst>
+            <a:gs pos="0">
+              <a:schemeClr val="phClr">
+                <a:satMod val="103000"/>
+                <a:lumMod val="102000"/>
+                <a:tint val="94000"/>
+              </a:schemeClr>
+            </a:gs>
+            <a:gs pos="50000">
+              <a:schemeClr val="phClr">
+                <a:satMod val="110000"/>
+                <a:lumMod val="100000"/>
+                <a:shade val="100000"/>
+              </a:schemeClr>
+            </a:gs>
+            <a:gs pos="100000">
+              <a:schemeClr val="phClr">
+                <a:lumMod val="99000"/>
+                <a:satMod val="120000"/>
+                <a:shade val="78000"/>
+              </a:schemeClr>
+            </a:gs>
+          </a:gsLst>
+          <a:lin ang="5400000" scaled="0"/>
+        </a:gradFill>
+      </a:fillStyleLst>
+      <a:lnStyleLst>
+        <a:ln w="6350" cap="flat" cmpd="sng" algn="ctr">
+          <a:solidFill>
+            <a:schemeClr val="phClr"/>
+          </a:solidFill>
+          <a:prstDash val="solid"/>
+          <a:miter lim="800000"/>
+        </a:ln>
+        <a:ln w="12700" cap="flat" cmpd="sng" algn="ctr">
+          <a:solidFill>
+            <a:schemeClr val="phClr"/>
+          </a:solidFill>
+          <a:prstDash val="solid"/>
+          <a:miter lim="800000"/>
+        </a:ln>
+        <a:ln w="19050" cap="flat" cmpd="sng" algn="ctr">
+          <a:solidFill>
+            <a:schemeClr val="phClr"/>
+          </a:solidFill>
+          <a:prstDash val="solid"/>
+          <a:miter lim="800000"/>
+        </a:ln>
+      </a:lnStyleLst>
+      <a:effectStyleLst>
+        <a:effectStyle>
+          <a:effectLst/>
+        </a:effectStyle>
+        <a:effectStyle>
+          <a:effectLst/>
+        </a:effectStyle>
+        <a:effectStyle>
+          <a:effectLst>
+            <a:outerShdw blurRad="57150" dist="19050" dir="5400000" algn="ctr" rotWithShape="0">
+              <a:srgbClr val="000000">
+                <a:alpha val="63000"/>
+              </a:srgbClr>
+            </a:outerShdw>
+          </a:effectLst>
+        </a:effectStyle>
+      </a:effectStyleLst>
+      <a:bgFillStyleLst>
+        <a:solidFill>
+          <a:schemeClr val="phClr"/>
+        </a:solidFill>
+        <a:solidFill>
+          <a:schemeClr val="phClr">
+            <a:tint val="95000"/>
+            <a:satMod val="170000"/>
+          </a:schemeClr>
+        </a:solidFill>
+        <a:gradFill rotWithShape="1">
+          <a:gsLst>
+            <a:gs pos="0">
+              <a:schemeClr val="phClr">
+                <a:tint val="93000"/>
+                <a:satMod val="150000"/>
+                <a:shade val="98000"/>
+                <a:lumMod val="102000"/>
+              </a:schemeClr>
+            </a:gs>
+            <a:gs pos="50000">
+              <a:schemeClr val="phClr">
+                <a:tint val="98000"/>
+                <a:satMod val="130000"/>
+                <a:shade val="90000"/>
+                <a:lumMod val="103000"/>
+              </a:schemeClr>
+            </a:gs>
+            <a:gs pos="100000">
+              <a:schemeClr val="phClr">
+                <a:shade val="63000"/>
+                <a:satMod val="120000"/>
+              </a:schemeClr>
+            </a:gs>
+          </a:gsLst>
+          <a:lin ang="5400000" scaled="0"/>
+        </a:gradFill>
+      </a:bgFillStyleLst>
+    </a:fmtScheme>
+  </a:themeElements>
+  <a:objectDefaults/>
+  <a:extraClrSchemeLst/>
+  <a:extLst>
+    <a:ext uri="{05A4C25C-085E-4340-85A3-A5531E510DB2}">
+      <thm15:themeFamily xmlns:thm15="http://schemas.microsoft.com/office/thememl/2012/main" name="Office Theme" id="{62F939B6-93AF-4DB8-9C6B-D6C7DFDC589F}" vid="{4A3C46E8-61CC-4603-A589-7422A47A8E4A}"/>
+    </a:ext>
+  </a:extLst>
+</a:theme>
 </file>
 
-<file path=customXml/item2.xml><?xml version="1.0" encoding="utf-8"?>
+<file path=customXml/item1.xml><?xml version="1.0" encoding="utf-8"?>
 <ct:contentTypeSchema xmlns:ct="http://schemas.microsoft.com/office/2006/metadata/contentType" xmlns:ma="http://schemas.microsoft.com/office/2006/metadata/properties/metaAttributes" ct:_="" ma:_="" ma:contentTypeName="Document" ma:contentTypeID="0x010100723942CCEB3A674D8F1F6472CCEFB38E" ma:contentTypeVersion="11" ma:contentTypeDescription="Create a new document." ma:contentTypeScope="" ma:versionID="e4de40d148e029d40e3aaddc8bf68a5e">
   <xsd:schema xmlns:xsd="http://www.w3.org/2001/XMLSchema" xmlns:xs="http://www.w3.org/2001/XMLSchema" xmlns:p="http://schemas.microsoft.com/office/2006/metadata/properties" xmlns:ns2="128482ec-0431-40d5-ab26-89ea2a4f3ccd" xmlns:ns3="60eb0cf4-ae2a-4762-800a-cb593b869ecb" xmlns:ns4="http://schemas.microsoft.com/sharepoint/v4" xmlns:ns5="a2e691a9-fcfc-4d85-a390-1894fe98bd9e" targetNamespace="http://schemas.microsoft.com/office/2006/metadata/properties" ma:root="true" ma:fieldsID="fce8e8bd091658f3fe51b22d57dec109" ns2:_="" ns3:_="" ns4:_="" ns5:_="">
     <xsd:import namespace="128482ec-0431-40d5-ab26-89ea2a4f3ccd"/>
@@ -4816,7 +5745,7 @@
 </ct:contentTypeSchema>
 </file>
 
-<file path=customXml/item3.xml><?xml version="1.0" encoding="utf-8"?>
+<file path=customXml/item2.xml><?xml version="1.0" encoding="utf-8"?>
 <p:properties xmlns:p="http://schemas.microsoft.com/office/2006/metadata/properties" xmlns:xsi="http://www.w3.org/2001/XMLSchema-instance" xmlns:pc="http://schemas.microsoft.com/office/infopath/2007/PartnerControls">
   <documentManagement>
     <IconOverlay xmlns="http://schemas.microsoft.com/sharepoint/v4" xsi:nil="true"/>
@@ -4831,15 +5760,16 @@
 </p:properties>
 </file>
 
-<file path=customXml/itemProps1.xml><?xml version="1.0" encoding="utf-8"?>
-<ds:datastoreItem xmlns:ds="http://schemas.openxmlformats.org/officeDocument/2006/customXml" ds:itemID="{AF8EC6D1-CB19-4400-AD0A-0C75CD884AEA}">
-  <ds:schemaRefs>
-    <ds:schemaRef ds:uri="http://schemas.microsoft.com/sharepoint/v3/contenttype/forms"/>
-  </ds:schemaRefs>
-</ds:datastoreItem>
+<file path=customXml/item3.xml><?xml version="1.0" encoding="utf-8"?>
+<?mso-contentType ?>
+<FormTemplates xmlns="http://schemas.microsoft.com/sharepoint/v3/contenttype/forms">
+  <Display>DocumentLibraryForm</Display>
+  <Edit>DocumentLibraryForm</Edit>
+  <New>DocumentLibraryForm</New>
+</FormTemplates>
 </file>
 
-<file path=customXml/itemProps2.xml><?xml version="1.0" encoding="utf-8"?>
+<file path=customXml/itemProps1.xml><?xml version="1.0" encoding="utf-8"?>
 <ds:datastoreItem xmlns:ds="http://schemas.openxmlformats.org/officeDocument/2006/customXml" ds:itemID="{D7B8C5DE-3345-4025-A942-C5AA68E55545}">
   <ds:schemaRefs>
     <ds:schemaRef ds:uri="http://schemas.microsoft.com/office/2006/metadata/contentType"/>
@@ -4860,7 +5790,7 @@
 </ds:datastoreItem>
 </file>
 
-<file path=customXml/itemProps3.xml><?xml version="1.0" encoding="utf-8"?>
+<file path=customXml/itemProps2.xml><?xml version="1.0" encoding="utf-8"?>
 <ds:datastoreItem xmlns:ds="http://schemas.openxmlformats.org/officeDocument/2006/customXml" ds:itemID="{B743389A-7EE0-4951-8919-E91DD69E3687}">
   <ds:schemaRefs>
     <ds:schemaRef ds:uri="128482ec-0431-40d5-ab26-89ea2a4f3ccd"/>
@@ -4870,4 +5800,12 @@
     <ds:schemaRef ds:uri="60eb0cf4-ae2a-4762-800a-cb593b869ecb"/>
   </ds:schemaRefs>
 </ds:datastoreItem>
+</file>
+
+<file path=customXml/itemProps3.xml><?xml version="1.0" encoding="utf-8"?>
+<ds:datastoreItem xmlns:ds="http://schemas.openxmlformats.org/officeDocument/2006/customXml" ds:itemID="{AF8EC6D1-CB19-4400-AD0A-0C75CD884AEA}">
+  <ds:schemaRefs>
+    <ds:schemaRef ds:uri="http://schemas.microsoft.com/sharepoint/v3/contenttype/forms"/>
+  </ds:schemaRefs>
+</ds:datastoreItem>
 </file>